--- a/slides/09_Bar_Charts_and_Histograms.pptx
+++ b/slides/09_Bar_Charts_and_Histograms.pptx
@@ -131,7 +131,7 @@
   <p:extLst>
     <p:ext uri="{521415D9-36F7-43E2-AB2F-B90AF26B5E84}">
       <p14:sectionLst xmlns:p14="http://schemas.microsoft.com/office/powerpoint/2010/main">
-        <p14:section name="Introduction" id="{0613ff6a-efe1-34e5-5974-f47321ba5b63}">
+        <p14:section name="Introduction" id="{4ced9bf5-8a38-9a5c-8a05-bca0ddb47eb6}">
           <p14:sldIdLst>
             <p14:sldId id="256"/>
             <p14:sldId id="257"/>
@@ -139,14 +139,14 @@
             <p14:sldId id="259"/>
           </p14:sldIdLst>
         </p14:section>
-        <p14:section name="Importing Plotly Express" id="{4a1dc2c1-d604-02d0-467c-3fd7d7be6c89}">
+        <p14:section name="Importing Plotly Express" id="{467323bb-b516-8ab1-9801-9a78cd8f6df9}">
           <p14:sldIdLst>
             <p14:sldId id="260"/>
             <p14:sldId id="261"/>
             <p14:sldId id="262"/>
           </p14:sldIdLst>
         </p14:section>
-        <p14:section name="Bar charts" id="{d0ab6642-4d15-4292-f48b-cf4bf0218641}">
+        <p14:section name="Bar charts" id="{9da31c38-2dc3-23e5-9f73-213db4eb4c47}">
           <p14:sldIdLst>
             <p14:sldId id="263"/>
             <p14:sldId id="264"/>
@@ -155,7 +155,7 @@
             <p14:sldId id="267"/>
           </p14:sldIdLst>
         </p14:section>
-        <p14:section name="Histograms" id="{39220362-89d1-77dc-108a-87d9b7180d56}">
+        <p14:section name="Histograms" id="{3518c0bc-58e1-26ec-f00d-86bdc207593f}">
           <p14:sldIdLst>
             <p14:sldId id="268"/>
             <p14:sldId id="269"/>
@@ -164,7 +164,7 @@
             <p14:sldId id="272"/>
           </p14:sldIdLst>
         </p14:section>
-        <p14:section name="Comparing two groups" id="{ac2232a7-bba1-36e3-1a58-f3ffe98f2af7}">
+        <p14:section name="Comparing two groups" id="{c0d4310e-2704-bc9c-8f32-019a1d648a44}">
           <p14:sldIdLst>
             <p14:sldId id="273"/>
             <p14:sldId id="274"/>
@@ -174,7 +174,7 @@
             <p14:sldId id="278"/>
           </p14:sldIdLst>
         </p14:section>
-        <p14:section name="Wrap up" id="{02a3ac40-472e-7409-3f94-dab59b56d050}">
+        <p14:section name="Wrap up" id="{df8c9bd1-9221-ea7b-cabf-fa8d7d54df93}">
           <p14:sldIdLst>
             <p14:sldId id="279"/>
             <p14:sldId id="280"/>
@@ -3907,7 +3907,7 @@
               <a:t> </a:t>
             </a:r>
             <a:r>
-              <a:rPr lang="en-US" sz="1300" dirty="0">
+              <a:rPr lang="en-US" sz="1300" b="1" dirty="0">
                 <a:solidFill>
                   <a:srgbClr val="B86E1E"/>
                 </a:solidFill>
@@ -4568,7 +4568,7 @@
               <a:t>Change </a:t>
             </a:r>
             <a:r>
-              <a:rPr lang="en-US" sz="1800" dirty="0">
+              <a:rPr lang="en-US" sz="1800" b="1" dirty="0">
                 <a:solidFill>
                   <a:srgbClr val="B86E1E"/>
                 </a:solidFill>
@@ -4587,7 +4587,7 @@
               <a:t> to </a:t>
             </a:r>
             <a:r>
-              <a:rPr lang="en-US" sz="1800" dirty="0">
+              <a:rPr lang="en-US" sz="1800" b="1" dirty="0">
                 <a:solidFill>
                   <a:srgbClr val="B86E1E"/>
                 </a:solidFill>
@@ -4633,7 +4633,7 @@
               <a:t>Change </a:t>
             </a:r>
             <a:r>
-              <a:rPr lang="en-US" sz="1800" dirty="0">
+              <a:rPr lang="en-US" sz="1800" b="1" dirty="0">
                 <a:solidFill>
                   <a:srgbClr val="B86E1E"/>
                 </a:solidFill>
@@ -4652,7 +4652,7 @@
               <a:t> to </a:t>
             </a:r>
             <a:r>
-              <a:rPr lang="en-US" sz="1800" dirty="0">
+              <a:rPr lang="en-US" sz="1800" b="1" dirty="0">
                 <a:solidFill>
                   <a:srgbClr val="B86E1E"/>
                 </a:solidFill>
@@ -5810,7 +5810,7 @@
               <a:t>We don't set </a:t>
             </a:r>
             <a:r>
-              <a:rPr lang="en-US" sz="1300" dirty="0">
+              <a:rPr lang="en-US" sz="1300" b="1" dirty="0">
                 <a:solidFill>
                   <a:srgbClr val="B86E1E"/>
                 </a:solidFill>
@@ -5829,7 +5829,7 @@
               <a:t>, because a histogram counts the rows for us. </a:t>
             </a:r>
             <a:r>
-              <a:rPr lang="en-US" sz="1300" dirty="0">
+              <a:rPr lang="en-US" sz="1300" b="1" dirty="0">
                 <a:solidFill>
                   <a:srgbClr val="B86E1E"/>
                 </a:solidFill>
@@ -6346,7 +6346,7 @@
               <a:t>Change </a:t>
             </a:r>
             <a:r>
-              <a:rPr lang="en-US" sz="1800" dirty="0">
+              <a:rPr lang="en-US" sz="1800" b="1" dirty="0">
                 <a:solidFill>
                   <a:srgbClr val="B86E1E"/>
                 </a:solidFill>
@@ -6365,7 +6365,7 @@
               <a:t> to </a:t>
             </a:r>
             <a:r>
-              <a:rPr lang="en-US" sz="1800" dirty="0">
+              <a:rPr lang="en-US" sz="1800" b="1" dirty="0">
                 <a:solidFill>
                   <a:srgbClr val="B86E1E"/>
                 </a:solidFill>
@@ -6411,7 +6411,7 @@
               <a:t>Then change it to </a:t>
             </a:r>
             <a:r>
-              <a:rPr lang="en-US" sz="1800" dirty="0">
+              <a:rPr lang="en-US" sz="1800" b="1" dirty="0">
                 <a:solidFill>
                   <a:srgbClr val="B86E1E"/>
                 </a:solidFill>
@@ -8540,7 +8540,7 @@
               <a:t>Remove the </a:t>
             </a:r>
             <a:r>
-              <a:rPr lang="en-US" sz="1800" dirty="0">
+              <a:rPr lang="en-US" sz="1800" b="1" dirty="0">
                 <a:solidFill>
                   <a:srgbClr val="B86E1E"/>
                 </a:solidFill>
@@ -8833,7 +8833,7 @@
               <a:t>Click </a:t>
             </a:r>
             <a:r>
-              <a:rPr lang="en-US" sz="1800" dirty="0">
+              <a:rPr lang="en-US" sz="1800" b="1" dirty="0">
                 <a:solidFill>
                   <a:srgbClr val="B86E1E"/>
                 </a:solidFill>
@@ -8852,7 +8852,7 @@
               <a:t> or </a:t>
             </a:r>
             <a:r>
-              <a:rPr lang="en-US" sz="1800" dirty="0">
+              <a:rPr lang="en-US" sz="1800" b="1" dirty="0">
                 <a:solidFill>
                   <a:srgbClr val="B86E1E"/>
                 </a:solidFill>
@@ -9055,7 +9055,7 @@
               <a:t>Why doesn't a histogram need a </a:t>
             </a:r>
             <a:r>
-              <a:rPr lang="en-US" sz="1800" dirty="0">
+              <a:rPr lang="en-US" sz="1800" b="1" dirty="0">
                 <a:solidFill>
                   <a:srgbClr val="E8A55A"/>
                 </a:solidFill>
@@ -9128,7 +9128,7 @@
               <a:t>Why did we use </a:t>
             </a:r>
             <a:r>
-              <a:rPr lang="en-US" sz="1800" dirty="0">
+              <a:rPr lang="en-US" sz="1800" b="1" dirty="0">
                 <a:solidFill>
                   <a:srgbClr val="E8A55A"/>
                 </a:solidFill>
@@ -10575,7 +10575,7 @@
               <a:t> → imports Plotly Express with the short name </a:t>
             </a:r>
             <a:r>
-              <a:rPr lang="en-US" sz="1200" dirty="0">
+              <a:rPr lang="en-US" sz="1200" b="1" dirty="0">
                 <a:solidFill>
                   <a:srgbClr val="B86E1E"/>
                 </a:solidFill>
